--- a/docs/papers/thesis/thesis_presentation_zh_30min.pptx
+++ b/docs/papers/thesis/thesis_presentation_zh_30min.pptx
@@ -10632,7 +10632,7 @@
                 </a:solidFill>
                 <a:latin typeface="Noto Sans TC"/>
               </a:rPr>
-              <a:t>• matrix evaluation</a:t>
+              <a:t>• 34 組範圍內／14 組範圍外壓力測試</a:t>
             </a:r>
           </a:p>
           <a:p>
@@ -11754,8 +11754,8 @@
         </p:nvSpPr>
         <p:spPr>
           <a:xfrm>
-            <a:off x="4233672" y="4379976"/>
-            <a:ext cx="7040880" cy="1234440"/>
+            <a:off x="4233672" y="4288536"/>
+            <a:ext cx="7040880" cy="1554480"/>
           </a:xfrm>
           <a:prstGeom prst="rect">
             <a:avLst/>
@@ -11799,8 +11799,8 @@
         </p:nvSpPr>
         <p:spPr>
           <a:xfrm>
-            <a:off x="4206240" y="4343400"/>
-            <a:ext cx="7040880" cy="1234440"/>
+            <a:off x="4206240" y="4251960"/>
+            <a:ext cx="7040880" cy="1554480"/>
           </a:xfrm>
           <a:prstGeom prst="rect">
             <a:avLst/>
@@ -11844,7 +11844,7 @@
         </p:nvSpPr>
         <p:spPr>
           <a:xfrm>
-            <a:off x="4206240" y="4343400"/>
+            <a:off x="4206240" y="4251960"/>
             <a:ext cx="7040880" cy="73152"/>
           </a:xfrm>
           <a:prstGeom prst="rect">
@@ -11889,7 +11889,7 @@
         </p:nvSpPr>
         <p:spPr>
           <a:xfrm>
-            <a:off x="4389120" y="4507992"/>
+            <a:off x="4389120" y="4416552"/>
             <a:ext cx="6675120" cy="329184"/>
           </a:xfrm>
           <a:prstGeom prst="rect">
@@ -11931,8 +11931,8 @@
         </p:nvSpPr>
         <p:spPr>
           <a:xfrm>
-            <a:off x="4398264" y="4946904"/>
-            <a:ext cx="6656832" cy="466344"/>
+            <a:off x="4398264" y="4855464"/>
+            <a:ext cx="6656832" cy="786384"/>
           </a:xfrm>
           <a:prstGeom prst="rect">
             <a:avLst/>
@@ -11952,15 +11952,15 @@
               <a:spcAft>
                 <a:spcPts val="400"/>
               </a:spcAft>
-              <a:defRPr sz="1100">
-                <a:solidFill>
-                  <a:srgbClr val="1E2733"/>
-                </a:solidFill>
-                <a:latin typeface="Noto Sans TC"/>
-              </a:defRPr>
-            </a:pPr>
-            <a:r>
-              <a:rPr sz="1100" b="0">
+              <a:defRPr sz="1000">
+                <a:solidFill>
+                  <a:srgbClr val="1E2733"/>
+                </a:solidFill>
+                <a:latin typeface="Noto Sans TC"/>
+              </a:defRPr>
+            </a:pPr>
+            <a:r>
+              <a:rPr sz="1000" b="0">
                 <a:solidFill>
                   <a:srgbClr val="1E2733"/>
                 </a:solidFill>
@@ -12002,21 +12002,46 @@
               <a:spcAft>
                 <a:spcPts val="400"/>
               </a:spcAft>
-              <a:defRPr sz="1100">
-                <a:solidFill>
-                  <a:srgbClr val="1E2733"/>
-                </a:solidFill>
-                <a:latin typeface="Noto Sans TC"/>
-              </a:defRPr>
-            </a:pPr>
-            <a:r>
-              <a:rPr sz="1100" b="0">
-                <a:solidFill>
-                  <a:srgbClr val="1E2733"/>
-                </a:solidFill>
-                <a:latin typeface="Noto Sans TC"/>
-              </a:rPr>
-              <a:t>• 推薦動作以實測 penalty 下降作為後續驗證指標</a:t>
+              <a:defRPr sz="1000">
+                <a:solidFill>
+                  <a:srgbClr val="1E2733"/>
+                </a:solidFill>
+                <a:latin typeface="Noto Sans TC"/>
+              </a:defRPr>
+            </a:pPr>
+            <a:r>
+              <a:rPr sz="1000" b="0">
+                <a:solidFill>
+                  <a:srgbClr val="1E2733"/>
+                </a:solidFill>
+                <a:latin typeface="Noto Sans TC"/>
+              </a:rPr>
+              <a:t>• 20,000 次 date-block bootstrap：三因子 MAE 降幅 95% CI 下界皆 &gt; 0</a:t>
+            </a:r>
+          </a:p>
+          <a:p>
+            <a:pPr>
+              <a:lnSpc>
+                <a:spcPct val="114000"/>
+              </a:lnSpc>
+              <a:spcAft>
+                <a:spcPts val="400"/>
+              </a:spcAft>
+              <a:defRPr sz="1000">
+                <a:solidFill>
+                  <a:srgbClr val="1E2733"/>
+                </a:solidFill>
+                <a:latin typeface="Noto Sans TC"/>
+              </a:defRPr>
+            </a:pPr>
+            <a:r>
+              <a:rPr sz="1000" b="0">
+                <a:solidFill>
+                  <a:srgbClr val="1E2733"/>
+                </a:solidFill>
+                <a:latin typeface="Noto Sans TC"/>
+              </a:rPr>
+              <a:t>• 逐日剔除最小降幅 T/H/L：0.6123 / 3.5551 / 290.5716</a:t>
             </a:r>
           </a:p>
         </p:txBody>
@@ -12770,21 +12795,21 @@
               <a:spcAft>
                 <a:spcPts val="400"/>
               </a:spcAft>
-              <a:defRPr sz="1200">
-                <a:solidFill>
-                  <a:srgbClr val="1E2733"/>
-                </a:solidFill>
-                <a:latin typeface="Noto Sans TC"/>
-              </a:defRPr>
-            </a:pPr>
-            <a:r>
-              <a:rPr sz="1200" b="0">
-                <a:solidFill>
-                  <a:srgbClr val="1E2733"/>
-                </a:solidFill>
-                <a:latin typeface="Noto Sans TC"/>
-              </a:rPr>
-              <a:t>• Snapshot count: 28</a:t>
+              <a:defRPr sz="1000">
+                <a:solidFill>
+                  <a:srgbClr val="1E2733"/>
+                </a:solidFill>
+                <a:latin typeface="Noto Sans TC"/>
+              </a:defRPr>
+            </a:pPr>
+            <a:r>
+              <a:rPr sz="1000" b="0">
+                <a:solidFill>
+                  <a:srgbClr val="1E2733"/>
+                </a:solidFill>
+                <a:latin typeface="Noto Sans TC"/>
+              </a:rPr>
+              <a:t>• 28 snapshots；pillow 不參與 8 角點 fitting</a:t>
             </a:r>
           </a:p>
           <a:p>
@@ -12795,21 +12820,21 @@
               <a:spcAft>
                 <a:spcPts val="400"/>
               </a:spcAft>
-              <a:defRPr sz="1200">
-                <a:solidFill>
-                  <a:srgbClr val="1E2733"/>
-                </a:solidFill>
-                <a:latin typeface="Noto Sans TC"/>
-              </a:defRPr>
-            </a:pPr>
-            <a:r>
-              <a:rPr sz="1200" b="0">
-                <a:solidFill>
-                  <a:srgbClr val="1E2733"/>
-                </a:solidFill>
-                <a:latin typeface="Noto Sans TC"/>
-              </a:rPr>
-              <a:t>• pillow 參考點不參與 8 角點 residual fitting</a:t>
+              <a:defRPr sz="1000">
+                <a:solidFill>
+                  <a:srgbClr val="1E2733"/>
+                </a:solidFill>
+                <a:latin typeface="Noto Sans TC"/>
+              </a:defRPr>
+            </a:pPr>
+            <a:r>
+              <a:rPr sz="1000" b="0">
+                <a:solidFill>
+                  <a:srgbClr val="1E2733"/>
+                </a:solidFill>
+                <a:latin typeface="Noto Sans TC"/>
+              </a:rPr>
+              <a:t>• Raw → corrected MAE: T=0.8967, H=4.1286, L=309.0142 → T=0.1676, H=0.3939, L=16.6450</a:t>
             </a:r>
           </a:p>
           <a:p>
@@ -12820,46 +12845,21 @@
               <a:spcAft>
                 <a:spcPts val="400"/>
               </a:spcAft>
-              <a:defRPr sz="1200">
-                <a:solidFill>
-                  <a:srgbClr val="1E2733"/>
-                </a:solidFill>
-                <a:latin typeface="Noto Sans TC"/>
-              </a:defRPr>
-            </a:pPr>
-            <a:r>
-              <a:rPr sz="1200" b="0">
-                <a:solidFill>
-                  <a:srgbClr val="1E2733"/>
-                </a:solidFill>
-                <a:latin typeface="Noto Sans TC"/>
-              </a:rPr>
-              <a:t>• Raw pillow MAE: T=0.8967, H=4.1286, L=309.0142</a:t>
-            </a:r>
-          </a:p>
-          <a:p>
-            <a:pPr>
-              <a:lnSpc>
-                <a:spcPct val="108000"/>
-              </a:lnSpc>
-              <a:spcAft>
-                <a:spcPts val="200"/>
-              </a:spcAft>
-              <a:defRPr sz="1400">
-                <a:solidFill>
-                  <a:srgbClr val="1E2733"/>
-                </a:solidFill>
-                <a:latin typeface="Cambria Math"/>
-              </a:defRPr>
-            </a:pPr>
-            <a:r>
-              <a:rPr sz="1400" b="0">
-                <a:solidFill>
-                  <a:srgbClr val="1E2733"/>
-                </a:solidFill>
-                <a:latin typeface="Cambria Math"/>
-              </a:rPr>
-              <a:t>Corrected pillow MAE: T=0.1676, H=0.3939, L=16.6450</a:t>
+              <a:defRPr sz="1000">
+                <a:solidFill>
+                  <a:srgbClr val="1E2733"/>
+                </a:solidFill>
+                <a:latin typeface="Noto Sans TC"/>
+              </a:defRPr>
+            </a:pPr>
+            <a:r>
+              <a:rPr sz="1000" b="0">
+                <a:solidFill>
+                  <a:srgbClr val="1E2733"/>
+                </a:solidFill>
+                <a:latin typeface="Noto Sans TC"/>
+              </a:rPr>
+              <a:t>• Paired bootstrap：20,000 次，以 7 個 date blocks 重抽樣</a:t>
             </a:r>
           </a:p>
           <a:p>
@@ -12870,21 +12870,21 @@
               <a:spcAft>
                 <a:spcPts val="400"/>
               </a:spcAft>
-              <a:defRPr sz="1200">
-                <a:solidFill>
-                  <a:srgbClr val="1E2733"/>
-                </a:solidFill>
-                <a:latin typeface="Noto Sans TC"/>
-              </a:defRPr>
-            </a:pPr>
-            <a:r>
-              <a:rPr sz="1200" b="0">
-                <a:solidFill>
-                  <a:srgbClr val="1E2733"/>
-                </a:solidFill>
-                <a:latin typeface="Noto Sans TC"/>
-              </a:rPr>
-              <a:t>• 支援範圍：此快照設定下的 held-out pillow 改善</a:t>
+              <a:defRPr sz="1000">
+                <a:solidFill>
+                  <a:srgbClr val="1E2733"/>
+                </a:solidFill>
+                <a:latin typeface="Noto Sans TC"/>
+              </a:defRPr>
+            </a:pPr>
+            <a:r>
+              <a:rPr sz="1000" b="0">
+                <a:solidFill>
+                  <a:srgbClr val="1E2733"/>
+                </a:solidFill>
+                <a:latin typeface="Noto Sans TC"/>
+              </a:rPr>
+              <a:t>• 95% CI (T/H/L reduction):</a:t>
             </a:r>
           </a:p>
           <a:p>
@@ -12895,21 +12895,71 @@
               <a:spcAft>
                 <a:spcPts val="400"/>
               </a:spcAft>
-              <a:defRPr sz="1200">
-                <a:solidFill>
-                  <a:srgbClr val="1E2733"/>
-                </a:solidFill>
-                <a:latin typeface="Noto Sans TC"/>
-              </a:defRPr>
-            </a:pPr>
-            <a:r>
-              <a:rPr sz="1200" b="0">
-                <a:solidFill>
-                  <a:srgbClr val="1E2733"/>
-                </a:solidFill>
-                <a:latin typeface="Noto Sans TC"/>
-              </a:rPr>
-              <a:t>• 尚未完成：全室 dense real-room truth 驗證</a:t>
+              <a:defRPr sz="1000">
+                <a:solidFill>
+                  <a:srgbClr val="1E2733"/>
+                </a:solidFill>
+                <a:latin typeface="Noto Sans TC"/>
+              </a:defRPr>
+            </a:pPr>
+            <a:r>
+              <a:rPr sz="1000" b="0">
+                <a:solidFill>
+                  <a:srgbClr val="1E2733"/>
+                </a:solidFill>
+                <a:latin typeface="Noto Sans TC"/>
+              </a:rPr>
+              <a:t>• [0.4582, 1.0232] / [3.2005, 4.2524] / [288.3083, 297.0237]</a:t>
+            </a:r>
+          </a:p>
+          <a:p>
+            <a:pPr>
+              <a:lnSpc>
+                <a:spcPct val="114000"/>
+              </a:lnSpc>
+              <a:spcAft>
+                <a:spcPts val="400"/>
+              </a:spcAft>
+              <a:defRPr sz="1000">
+                <a:solidFill>
+                  <a:srgbClr val="1E2733"/>
+                </a:solidFill>
+                <a:latin typeface="Noto Sans TC"/>
+              </a:defRPr>
+            </a:pPr>
+            <a:r>
+              <a:rPr sz="1000" b="0">
+                <a:solidFill>
+                  <a:srgbClr val="1E2733"/>
+                </a:solidFill>
+                <a:latin typeface="Noto Sans TC"/>
+              </a:rPr>
+              <a:t>• 改善快照：T 26/28；H/L 28/28；仍非 dense truth</a:t>
+            </a:r>
+          </a:p>
+          <a:p>
+            <a:pPr>
+              <a:lnSpc>
+                <a:spcPct val="114000"/>
+              </a:lnSpc>
+              <a:spcAft>
+                <a:spcPts val="400"/>
+              </a:spcAft>
+              <a:defRPr sz="1000">
+                <a:solidFill>
+                  <a:srgbClr val="1E2733"/>
+                </a:solidFill>
+                <a:latin typeface="Noto Sans TC"/>
+              </a:defRPr>
+            </a:pPr>
+            <a:r>
+              <a:rPr sz="1000" b="0">
+                <a:solidFill>
+                  <a:srgbClr val="1E2733"/>
+                </a:solidFill>
+                <a:latin typeface="Noto Sans TC"/>
+              </a:rPr>
+              <a:t>• 7-fold 逐日剔除最小降幅：T 0.6123；H 3.5551；L 290.5716</a:t>
             </a:r>
           </a:p>
         </p:txBody>
@@ -13159,7 +13209,7 @@
                 </a:solidFill>
                 <a:latin typeface="Noto Sans TC"/>
               </a:rPr>
-              <a:t>• 不可解讀為已完成實際控制有效性的因果驗證</a:t>
+              <a:t>• versioned schema、空白 trial template 與 deterministic analyzer 已完成</a:t>
             </a:r>
           </a:p>
           <a:p>
@@ -13184,7 +13234,7 @@
                 </a:solidFill>
                 <a:latin typeface="Noto Sans TC"/>
               </a:rPr>
-              <a:t>• 正式驗證應執行 before/after intervention</a:t>
+              <a:t>• 完成真實介入 trials：0；status：NOT_EVALUATED</a:t>
             </a:r>
           </a:p>
           <a:p>
@@ -13209,7 +13259,7 @@
                 </a:solidFill>
                 <a:latin typeface="Noto Sans TC"/>
               </a:rPr>
-              <a:t>• 比較 predicted improvement、actual penalty reduction 與 action rank consistency</a:t>
+              <a:t>• 所有 efficacy estimates 維持 null；synthetic tests 只驗證公式</a:t>
             </a:r>
           </a:p>
           <a:p>
@@ -13234,7 +13284,7 @@
                 </a:solidFill>
                 <a:latin typeface="Noto Sans TC"/>
               </a:rPr>
-              <a:t>• 此項列為未來工作與驗證限制</a:t>
+              <a:t>• 正式驗證仍須 before/after intervention 與 matched controls</a:t>
             </a:r>
           </a:p>
         </p:txBody>
@@ -14568,21 +14618,21 @@
               <a:spcAft>
                 <a:spcPts val="400"/>
               </a:spcAft>
-              <a:defRPr sz="1100">
-                <a:solidFill>
-                  <a:srgbClr val="1E2733"/>
-                </a:solidFill>
-                <a:latin typeface="Noto Sans TC"/>
-              </a:defRPr>
-            </a:pPr>
-            <a:r>
-              <a:rPr sz="1100" b="0">
-                <a:solidFill>
-                  <a:srgbClr val="1E2733"/>
-                </a:solidFill>
-                <a:latin typeface="Noto Sans TC"/>
-              </a:rPr>
-              <a:t>• S1：純照度短視窗，persistence 最強，是劣勢</a:t>
+              <a:defRPr sz="1000">
+                <a:solidFill>
+                  <a:srgbClr val="1E2733"/>
+                </a:solidFill>
+                <a:latin typeface="Noto Sans TC"/>
+              </a:defRPr>
+            </a:pPr>
+            <a:r>
+              <a:rPr sz="1000" b="0">
+                <a:solidFill>
+                  <a:srgbClr val="1E2733"/>
+                </a:solidFill>
+                <a:latin typeface="Noto Sans TC"/>
+              </a:rPr>
+              <a:t>• SML2010 24 任務：12 lowest MAE、15 勝 LR、14 勝 persistence</a:t>
             </a:r>
           </a:p>
           <a:p>
@@ -14593,21 +14643,21 @@
               <a:spcAft>
                 <a:spcPts val="400"/>
               </a:spcAft>
-              <a:defRPr sz="1100">
-                <a:solidFill>
-                  <a:srgbClr val="1E2733"/>
-                </a:solidFill>
-                <a:latin typeface="Noto Sans TC"/>
-              </a:defRPr>
-            </a:pPr>
-            <a:r>
-              <a:rPr sz="1100" b="0">
-                <a:solidFill>
-                  <a:srgbClr val="1E2733"/>
-                </a:solidFill>
-                <a:latin typeface="Noto Sans TC"/>
-              </a:rPr>
-              <a:t>• S2：長視窗溫度有優勢，但濕度有尺度對齊問題</a:t>
+              <a:defRPr sz="1000">
+                <a:solidFill>
+                  <a:srgbClr val="1E2733"/>
+                </a:solidFill>
+                <a:latin typeface="Noto Sans TC"/>
+              </a:defRPr>
+            </a:pPr>
+            <a:r>
+              <a:rPr sz="1000" b="0">
+                <a:solidFill>
+                  <a:srgbClr val="1E2733"/>
+                </a:solidFill>
+                <a:latin typeface="Noto Sans TC"/>
+              </a:rPr>
+              <a:t>• 原 E9：S1 照度弱；S2 混合；S3 event delta 最強</a:t>
             </a:r>
           </a:p>
           <a:p>
@@ -14618,21 +14668,21 @@
               <a:spcAft>
                 <a:spcPts val="400"/>
               </a:spcAft>
-              <a:defRPr sz="1100">
-                <a:solidFill>
-                  <a:srgbClr val="1E2733"/>
-                </a:solidFill>
-                <a:latin typeface="Noto Sans TC"/>
-              </a:defRPr>
-            </a:pPr>
-            <a:r>
-              <a:rPr sz="1100" b="0">
-                <a:solidFill>
-                  <a:srgbClr val="1E2733"/>
-                </a:solidFill>
-                <a:latin typeface="Noto Sans TC"/>
-              </a:rPr>
-              <a:t>• S3：事件 delta response 是主要優勢</a:t>
+              <a:defRPr sz="1000">
+                <a:solidFill>
+                  <a:srgbClr val="1E2733"/>
+                </a:solidFill>
+                <a:latin typeface="Noto Sans TC"/>
+              </a:defRPr>
+            </a:pPr>
+            <a:r>
+              <a:rPr sz="1000" b="0">
+                <a:solidFill>
+                  <a:srgbClr val="1E2733"/>
+                </a:solidFill>
+                <a:latin typeface="Noto Sans TC"/>
+              </a:rPr>
+              <a:t>• Oh-inspired：15min 兩點 T 最佳；本研究 readout 在 60min 最佳</a:t>
             </a:r>
           </a:p>
           <a:p>
@@ -14643,21 +14693,21 @@
               <a:spcAft>
                 <a:spcPts val="400"/>
               </a:spcAft>
-              <a:defRPr sz="1100">
-                <a:solidFill>
-                  <a:srgbClr val="1E2733"/>
-                </a:solidFill>
-                <a:latin typeface="Noto Sans TC"/>
-              </a:defRPr>
-            </a:pPr>
-            <a:r>
-              <a:rPr sz="1100" b="0">
-                <a:solidFill>
-                  <a:srgbClr val="1E2733"/>
-                </a:solidFill>
-                <a:latin typeface="Noto Sans TC"/>
-              </a:rPr>
-              <a:t>• SML2010 24 任務：12 lowest MAE、15 勝 LR、14 勝 persistence</a:t>
+              <a:defRPr sz="1000">
+                <a:solidFill>
+                  <a:srgbClr val="1E2733"/>
+                </a:solidFill>
+                <a:latin typeface="Noto Sans TC"/>
+              </a:defRPr>
+            </a:pPr>
+            <a:r>
+              <a:rPr sz="1000" b="0">
+                <a:solidFill>
+                  <a:srgbClr val="1E2733"/>
+                </a:solidFill>
+                <a:latin typeface="Noto Sans TC"/>
+              </a:rPr>
+              <a:t>• 24h 兩點 T 皆由 persistence 最佳；transfer 亦劣於 raw physics</a:t>
             </a:r>
           </a:p>
           <a:p>
@@ -14668,21 +14718,96 @@
               <a:spcAft>
                 <a:spcPts val="400"/>
               </a:spcAft>
-              <a:defRPr sz="1100">
-                <a:solidFill>
-                  <a:srgbClr val="1E2733"/>
-                </a:solidFill>
-                <a:latin typeface="Noto Sans TC"/>
-              </a:defRPr>
-            </a:pPr>
-            <a:r>
-              <a:rPr sz="1100" b="0">
-                <a:solidFill>
-                  <a:srgbClr val="1E2733"/>
-                </a:solidFill>
-                <a:latin typeface="Noto Sans TC"/>
-              </a:rPr>
-              <a:t>• 不能宣稱公開資料等同 full 3D 場驗證</a:t>
+              <a:defRPr sz="1000">
+                <a:solidFill>
+                  <a:srgbClr val="1E2733"/>
+                </a:solidFill>
+                <a:latin typeface="Noto Sans TC"/>
+              </a:defRPr>
+            </a:pPr>
+            <a:r>
+              <a:rPr sz="1000" b="0">
+                <a:solidFill>
+                  <a:srgbClr val="1E2733"/>
+                </a:solidFill>
+                <a:latin typeface="Noto Sans TC"/>
+              </a:rPr>
+              <a:t>• 次日 primary 選中 trend 但 test 惡化 7.34% / 8.36%，CI 均跨 0</a:t>
+            </a:r>
+          </a:p>
+          <a:p>
+            <a:pPr>
+              <a:lnSpc>
+                <a:spcPct val="114000"/>
+              </a:lnSpc>
+              <a:spcAft>
+                <a:spcPts val="400"/>
+              </a:spcAft>
+              <a:defRPr sz="1000">
+                <a:solidFill>
+                  <a:srgbClr val="1E2733"/>
+                </a:solidFill>
+                <a:latin typeface="Noto Sans TC"/>
+              </a:defRPr>
+            </a:pPr>
+            <a:r>
+              <a:rPr sz="1000" b="0">
+                <a:solidFill>
+                  <a:srgbClr val="1E2733"/>
+                </a:solidFill>
+                <a:latin typeface="Noto Sans TC"/>
+              </a:rPr>
+              <a:t>• Post-primary adaptive 亦惡化；未建立 next-day advantage</a:t>
+            </a:r>
+          </a:p>
+          <a:p>
+            <a:pPr>
+              <a:lnSpc>
+                <a:spcPct val="114000"/>
+              </a:lnSpc>
+              <a:spcAft>
+                <a:spcPts val="400"/>
+              </a:spcAft>
+              <a:defRPr sz="1000">
+                <a:solidFill>
+                  <a:srgbClr val="1E2733"/>
+                </a:solidFill>
+                <a:latin typeface="Noto Sans TC"/>
+              </a:defRPr>
+            </a:pPr>
+            <a:r>
+              <a:rPr sz="1000" b="0">
+                <a:solidFill>
+                  <a:srgbClr val="1E2733"/>
+                </a:solidFill>
+                <a:latin typeface="Noto Sans TC"/>
+              </a:rPr>
+              <a:t>• RNN 公平比較：12/12 parity 通過；lowest MAE 為 sequence LR 7、persistence 5、RNN 0</a:t>
+            </a:r>
+          </a:p>
+          <a:p>
+            <a:pPr>
+              <a:lnSpc>
+                <a:spcPct val="114000"/>
+              </a:lnSpc>
+              <a:spcAft>
+                <a:spcPts val="400"/>
+              </a:spcAft>
+              <a:defRPr sz="1000">
+                <a:solidFill>
+                  <a:srgbClr val="1E2733"/>
+                </a:solidFill>
+                <a:latin typeface="Noto Sans TC"/>
+              </a:defRPr>
+            </a:pPr>
+            <a:r>
+              <a:rPr sz="1000" b="0">
+                <a:solidFill>
+                  <a:srgbClr val="1E2733"/>
+                </a:solidFill>
+                <a:latin typeface="Noto Sans TC"/>
+              </a:rPr>
+              <a:t>• 資料 confidential；只稱 method transfer，不稱原文重現或 full 3D 驗證</a:t>
             </a:r>
           </a:p>
         </p:txBody>
@@ -16076,6 +16201,56 @@
                 </a:solidFill>
                 <a:latin typeface="Noto Sans TC"/>
               </a:rPr>
+              <a:t>• 室內溫度適用範圍限 20–30 °C；人體舒適以 tolerance 判定</a:t>
+            </a:r>
+          </a:p>
+          <a:p>
+            <a:pPr>
+              <a:lnSpc>
+                <a:spcPct val="114000"/>
+              </a:lnSpc>
+              <a:spcAft>
+                <a:spcPts val="400"/>
+              </a:spcAft>
+              <a:defRPr sz="1100">
+                <a:solidFill>
+                  <a:srgbClr val="1E2733"/>
+                </a:solidFill>
+                <a:latin typeface="Noto Sans TC"/>
+              </a:defRPr>
+            </a:pPr>
+            <a:r>
+              <a:rPr sz="1100" b="0">
+                <a:solidFill>
+                  <a:srgbClr val="1E2733"/>
+                </a:solidFill>
+                <a:latin typeface="Noto Sans TC"/>
+              </a:rPr>
+              <a:t>• 固定 RNN 同資料比較 lowest MAE 為 0/12</a:t>
+            </a:r>
+          </a:p>
+          <a:p>
+            <a:pPr>
+              <a:lnSpc>
+                <a:spcPct val="114000"/>
+              </a:lnSpc>
+              <a:spcAft>
+                <a:spcPts val="400"/>
+              </a:spcAft>
+              <a:defRPr sz="1100">
+                <a:solidFill>
+                  <a:srgbClr val="1E2733"/>
+                </a:solidFill>
+                <a:latin typeface="Noto Sans TC"/>
+              </a:defRPr>
+            </a:pPr>
+            <a:r>
+              <a:rPr sz="1100" b="0">
+                <a:solidFill>
+                  <a:srgbClr val="1E2733"/>
+                </a:solidFill>
+                <a:latin typeface="Noto Sans TC"/>
+              </a:rPr>
               <a:t>• 推薦動作尚未完成真實介入式因果驗證</a:t>
             </a:r>
           </a:p>
@@ -16376,7 +16551,7 @@
                 </a:solidFill>
                 <a:latin typeface="Noto Sans TC"/>
               </a:rPr>
-              <a:t>• 把 CU-BEMS / SML2010 / ASHRAE 納入 task-aligned benchmark</a:t>
+              <a:t>• 補足 PPFD/CO2/基質與生物 endpoint 後再評估動態植物生長情境</a:t>
             </a:r>
           </a:p>
           <a:p>
@@ -16401,6 +16576,31 @@
                 </a:solidFill>
                 <a:latin typeface="Noto Sans TC"/>
               </a:rPr>
+              <a:t>• 定義狀態與雜訊模型後比較 moving average、KF、EKF</a:t>
+            </a:r>
+          </a:p>
+          <a:p>
+            <a:pPr>
+              <a:lnSpc>
+                <a:spcPct val="114000"/>
+              </a:lnSpc>
+              <a:spcAft>
+                <a:spcPts val="400"/>
+              </a:spcAft>
+              <a:defRPr sz="1100">
+                <a:solidFill>
+                  <a:srgbClr val="1E2733"/>
+                </a:solidFill>
+                <a:latin typeface="Noto Sans TC"/>
+              </a:defRPr>
+            </a:pPr>
+            <a:r>
+              <a:rPr sz="1100" b="0">
+                <a:solidFill>
+                  <a:srgbClr val="1E2733"/>
+                </a:solidFill>
+                <a:latin typeface="Noto Sans TC"/>
+              </a:rPr>
               <a:t>• 執行推薦動作 before/after 介入驗證</a:t>
             </a:r>
           </a:p>
@@ -16426,7 +16626,7 @@
                 </a:solidFill>
                 <a:latin typeface="Noto Sans TC"/>
               </a:rPr>
-              <a:t>• 朝閉環控制與遠端 MCP 延伸</a:t>
+              <a:t>• 朝閉環控制延伸</a:t>
             </a:r>
           </a:p>
         </p:txBody>
@@ -20511,1139 +20711,38 @@
                 </a:solidFill>
                 <a:latin typeface="Noto Sans TC"/>
               </a:rPr>
-              <a:t>研究主軸與輸入輸出</a:t>
-            </a:r>
-          </a:p>
-        </p:txBody>
-      </p:sp>
-      <p:sp>
-        <p:nvSpPr>
-          <p:cNvPr id="5" name="Rectangle 4"/>
-          <p:cNvSpPr/>
-          <p:nvPr/>
-        </p:nvSpPr>
-        <p:spPr>
-          <a:xfrm>
-            <a:off x="804672" y="1362456"/>
-            <a:ext cx="10607040" cy="1463040"/>
-          </a:xfrm>
-          <a:prstGeom prst="rect">
-            <a:avLst/>
-          </a:prstGeom>
-          <a:solidFill>
-            <a:srgbClr val="E2E8F0"/>
-          </a:solidFill>
-          <a:ln>
-            <a:solidFill>
-              <a:srgbClr val="E2E8F0"/>
-            </a:solidFill>
-          </a:ln>
-        </p:spPr>
-        <p:style>
-          <a:lnRef idx="1">
-            <a:schemeClr val="accent1"/>
-          </a:lnRef>
-          <a:fillRef idx="3">
-            <a:schemeClr val="accent1"/>
-          </a:fillRef>
-          <a:effectRef idx="2">
-            <a:schemeClr val="accent1"/>
-          </a:effectRef>
-          <a:fontRef idx="minor">
-            <a:schemeClr val="lt1"/>
-          </a:fontRef>
-        </p:style>
-        <p:txBody>
-          <a:bodyPr rtlCol="0" anchor="ctr"/>
-          <a:lstStyle/>
-          <a:p>
-            <a:pPr algn="ctr"/>
-          </a:p>
-        </p:txBody>
-      </p:sp>
-      <p:sp>
-        <p:nvSpPr>
-          <p:cNvPr id="6" name="Rectangle 5"/>
-          <p:cNvSpPr/>
-          <p:nvPr/>
-        </p:nvSpPr>
-        <p:spPr>
-          <a:xfrm>
-            <a:off x="777240" y="1325880"/>
-            <a:ext cx="10607040" cy="1463040"/>
-          </a:xfrm>
-          <a:prstGeom prst="rect">
-            <a:avLst/>
-          </a:prstGeom>
-          <a:solidFill>
-            <a:srgbClr val="FFFFFF"/>
-          </a:solidFill>
-          <a:ln w="10160">
-            <a:solidFill>
-              <a:srgbClr val="D1DBE7"/>
-            </a:solidFill>
-          </a:ln>
-        </p:spPr>
-        <p:style>
-          <a:lnRef idx="1">
-            <a:schemeClr val="accent1"/>
-          </a:lnRef>
-          <a:fillRef idx="3">
-            <a:schemeClr val="accent1"/>
-          </a:fillRef>
-          <a:effectRef idx="2">
-            <a:schemeClr val="accent1"/>
-          </a:effectRef>
-          <a:fontRef idx="minor">
-            <a:schemeClr val="lt1"/>
-          </a:fontRef>
-        </p:style>
-        <p:txBody>
-          <a:bodyPr rtlCol="0" anchor="ctr"/>
-          <a:lstStyle/>
-          <a:p>
-            <a:pPr algn="ctr"/>
-          </a:p>
-        </p:txBody>
-      </p:sp>
-      <p:sp>
-        <p:nvSpPr>
-          <p:cNvPr id="7" name="Rectangle 6"/>
-          <p:cNvSpPr/>
-          <p:nvPr/>
-        </p:nvSpPr>
-        <p:spPr>
-          <a:xfrm>
-            <a:off x="777240" y="1325880"/>
-            <a:ext cx="10607040" cy="73152"/>
-          </a:xfrm>
-          <a:prstGeom prst="rect">
-            <a:avLst/>
-          </a:prstGeom>
-          <a:solidFill>
-            <a:srgbClr val="2D9BC8"/>
-          </a:solidFill>
-          <a:ln>
-            <a:solidFill>
-              <a:srgbClr val="2D9BC8"/>
-            </a:solidFill>
-          </a:ln>
-        </p:spPr>
-        <p:style>
-          <a:lnRef idx="1">
-            <a:schemeClr val="accent1"/>
-          </a:lnRef>
-          <a:fillRef idx="3">
-            <a:schemeClr val="accent1"/>
-          </a:fillRef>
-          <a:effectRef idx="2">
-            <a:schemeClr val="accent1"/>
-          </a:effectRef>
-          <a:fontRef idx="minor">
-            <a:schemeClr val="lt1"/>
-          </a:fontRef>
-        </p:style>
-        <p:txBody>
-          <a:bodyPr rtlCol="0" anchor="ctr"/>
-          <a:lstStyle/>
-          <a:p>
-            <a:pPr algn="ctr"/>
-          </a:p>
-        </p:txBody>
-      </p:sp>
-      <p:sp>
-        <p:nvSpPr>
-          <p:cNvPr id="8" name="TextBox 7"/>
-          <p:cNvSpPr txBox="1"/>
-          <p:nvPr/>
-        </p:nvSpPr>
-        <p:spPr>
-          <a:xfrm>
-            <a:off x="960120" y="1490472"/>
-            <a:ext cx="10241280" cy="329184"/>
-          </a:xfrm>
-          <a:prstGeom prst="rect">
-            <a:avLst/>
-          </a:prstGeom>
-          <a:noFill/>
-        </p:spPr>
-        <p:txBody>
-          <a:bodyPr wrap="square" lIns="0" rIns="0" tIns="0" bIns="0">
-            <a:normAutofit/>
-          </a:bodyPr>
-          <a:lstStyle/>
-          <a:p>
-            <a:pPr>
-              <a:defRPr sz="1600" b="1">
-                <a:solidFill>
-                  <a:srgbClr val="006194"/>
-                </a:solidFill>
-                <a:latin typeface="Noto Sans TC"/>
-              </a:defRPr>
-            </a:pPr>
-            <a:r>
-              <a:rPr sz="1600" b="1">
-                <a:solidFill>
-                  <a:srgbClr val="006194"/>
-                </a:solidFill>
-                <a:latin typeface="Noto Sans TC"/>
-              </a:rPr>
-              <a:t>研究主軸</a:t>
-            </a:r>
-          </a:p>
-        </p:txBody>
-      </p:sp>
-      <p:sp>
-        <p:nvSpPr>
-          <p:cNvPr id="9" name="TextBox 8"/>
-          <p:cNvSpPr txBox="1"/>
-          <p:nvPr/>
-        </p:nvSpPr>
-        <p:spPr>
-          <a:xfrm>
-            <a:off x="969264" y="1929384"/>
-            <a:ext cx="10222992" cy="694944"/>
-          </a:xfrm>
-          <a:prstGeom prst="rect">
-            <a:avLst/>
-          </a:prstGeom>
-          <a:noFill/>
-        </p:spPr>
-        <p:txBody>
-          <a:bodyPr wrap="square" anchor="t" lIns="0" rIns="0" tIns="0" bIns="0">
-            <a:normAutofit/>
-          </a:bodyPr>
-          <a:lstStyle/>
-          <a:p>
-            <a:pPr>
-              <a:lnSpc>
-                <a:spcPct val="114000"/>
-              </a:lnSpc>
-              <a:spcAft>
-                <a:spcPts val="400"/>
-              </a:spcAft>
-              <a:defRPr sz="1500">
-                <a:solidFill>
-                  <a:srgbClr val="1E2733"/>
-                </a:solidFill>
-                <a:latin typeface="Noto Sans TC"/>
-              </a:defRPr>
-            </a:pPr>
-            <a:r>
-              <a:rPr sz="1500" b="0">
-                <a:solidFill>
-                  <a:srgbClr val="1E2733"/>
-                </a:solidFill>
-                <a:latin typeface="Noto Sans TC"/>
-              </a:rPr>
-              <a:t>• 少量角落感測 + 非連網家電 + 單房間幾何配置 → 可解釋、可校正、可學習的三因子空間場估計與決策支援。</a:t>
-            </a:r>
-          </a:p>
-        </p:txBody>
-      </p:sp>
-      <p:sp>
-        <p:nvSpPr>
-          <p:cNvPr id="10" name="Rectangle 9"/>
-          <p:cNvSpPr/>
-          <p:nvPr/>
-        </p:nvSpPr>
-        <p:spPr>
-          <a:xfrm>
-            <a:off x="804672" y="3099816"/>
-            <a:ext cx="3337560" cy="2560320"/>
-          </a:xfrm>
-          <a:prstGeom prst="rect">
-            <a:avLst/>
-          </a:prstGeom>
-          <a:solidFill>
-            <a:srgbClr val="E2E8F0"/>
-          </a:solidFill>
-          <a:ln>
-            <a:solidFill>
-              <a:srgbClr val="E2E8F0"/>
-            </a:solidFill>
-          </a:ln>
-        </p:spPr>
-        <p:style>
-          <a:lnRef idx="1">
-            <a:schemeClr val="accent1"/>
-          </a:lnRef>
-          <a:fillRef idx="3">
-            <a:schemeClr val="accent1"/>
-          </a:fillRef>
-          <a:effectRef idx="2">
-            <a:schemeClr val="accent1"/>
-          </a:effectRef>
-          <a:fontRef idx="minor">
-            <a:schemeClr val="lt1"/>
-          </a:fontRef>
-        </p:style>
-        <p:txBody>
-          <a:bodyPr rtlCol="0" anchor="ctr"/>
-          <a:lstStyle/>
-          <a:p>
-            <a:pPr algn="ctr"/>
-          </a:p>
-        </p:txBody>
-      </p:sp>
-      <p:sp>
-        <p:nvSpPr>
-          <p:cNvPr id="11" name="Rectangle 10"/>
-          <p:cNvSpPr/>
-          <p:nvPr/>
-        </p:nvSpPr>
-        <p:spPr>
-          <a:xfrm>
-            <a:off x="777240" y="3063240"/>
-            <a:ext cx="3337560" cy="2560320"/>
-          </a:xfrm>
-          <a:prstGeom prst="rect">
-            <a:avLst/>
-          </a:prstGeom>
-          <a:solidFill>
-            <a:srgbClr val="FFFFFF"/>
-          </a:solidFill>
-          <a:ln w="10160">
-            <a:solidFill>
-              <a:srgbClr val="D1DBE7"/>
-            </a:solidFill>
-          </a:ln>
-        </p:spPr>
-        <p:style>
-          <a:lnRef idx="1">
-            <a:schemeClr val="accent1"/>
-          </a:lnRef>
-          <a:fillRef idx="3">
-            <a:schemeClr val="accent1"/>
-          </a:fillRef>
-          <a:effectRef idx="2">
-            <a:schemeClr val="accent1"/>
-          </a:effectRef>
-          <a:fontRef idx="minor">
-            <a:schemeClr val="lt1"/>
-          </a:fontRef>
-        </p:style>
-        <p:txBody>
-          <a:bodyPr rtlCol="0" anchor="ctr"/>
-          <a:lstStyle/>
-          <a:p>
-            <a:pPr algn="ctr"/>
-          </a:p>
-        </p:txBody>
-      </p:sp>
-      <p:sp>
-        <p:nvSpPr>
-          <p:cNvPr id="12" name="Rectangle 11"/>
-          <p:cNvSpPr/>
-          <p:nvPr/>
-        </p:nvSpPr>
-        <p:spPr>
-          <a:xfrm>
-            <a:off x="777240" y="3063240"/>
-            <a:ext cx="3337560" cy="73152"/>
-          </a:xfrm>
-          <a:prstGeom prst="rect">
-            <a:avLst/>
-          </a:prstGeom>
-          <a:solidFill>
-            <a:srgbClr val="2D9BC8"/>
-          </a:solidFill>
-          <a:ln>
-            <a:solidFill>
-              <a:srgbClr val="2D9BC8"/>
-            </a:solidFill>
-          </a:ln>
-        </p:spPr>
-        <p:style>
-          <a:lnRef idx="1">
-            <a:schemeClr val="accent1"/>
-          </a:lnRef>
-          <a:fillRef idx="3">
-            <a:schemeClr val="accent1"/>
-          </a:fillRef>
-          <a:effectRef idx="2">
-            <a:schemeClr val="accent1"/>
-          </a:effectRef>
-          <a:fontRef idx="minor">
-            <a:schemeClr val="lt1"/>
-          </a:fontRef>
-        </p:style>
-        <p:txBody>
-          <a:bodyPr rtlCol="0" anchor="ctr"/>
-          <a:lstStyle/>
-          <a:p>
-            <a:pPr algn="ctr"/>
-          </a:p>
-        </p:txBody>
-      </p:sp>
-      <p:sp>
-        <p:nvSpPr>
-          <p:cNvPr id="13" name="TextBox 12"/>
-          <p:cNvSpPr txBox="1"/>
-          <p:nvPr/>
-        </p:nvSpPr>
-        <p:spPr>
-          <a:xfrm>
-            <a:off x="960120" y="3227832"/>
-            <a:ext cx="2971800" cy="329184"/>
-          </a:xfrm>
-          <a:prstGeom prst="rect">
-            <a:avLst/>
-          </a:prstGeom>
-          <a:noFill/>
-        </p:spPr>
-        <p:txBody>
-          <a:bodyPr wrap="square" lIns="0" rIns="0" tIns="0" bIns="0">
-            <a:normAutofit/>
-          </a:bodyPr>
-          <a:lstStyle/>
-          <a:p>
-            <a:pPr>
-              <a:defRPr sz="1600" b="1">
-                <a:solidFill>
-                  <a:srgbClr val="006194"/>
-                </a:solidFill>
-                <a:latin typeface="Noto Sans TC"/>
-              </a:defRPr>
-            </a:pPr>
-            <a:r>
-              <a:rPr sz="1600" b="1">
-                <a:solidFill>
-                  <a:srgbClr val="006194"/>
-                </a:solidFill>
-                <a:latin typeface="Noto Sans TC"/>
-              </a:rPr>
-              <a:t>輸入</a:t>
-            </a:r>
-          </a:p>
-        </p:txBody>
-      </p:sp>
-      <p:sp>
-        <p:nvSpPr>
-          <p:cNvPr id="14" name="TextBox 13"/>
-          <p:cNvSpPr txBox="1"/>
-          <p:nvPr/>
-        </p:nvSpPr>
-        <p:spPr>
-          <a:xfrm>
-            <a:off x="969264" y="3666744"/>
-            <a:ext cx="2953512" cy="1792224"/>
-          </a:xfrm>
-          <a:prstGeom prst="rect">
-            <a:avLst/>
-          </a:prstGeom>
-          <a:noFill/>
-        </p:spPr>
-        <p:txBody>
-          <a:bodyPr wrap="square" anchor="t" lIns="0" rIns="0" tIns="0" bIns="0">
-            <a:normAutofit/>
-          </a:bodyPr>
-          <a:lstStyle/>
-          <a:p>
-            <a:pPr>
-              <a:lnSpc>
-                <a:spcPct val="114000"/>
-              </a:lnSpc>
-              <a:spcAft>
-                <a:spcPts val="400"/>
-              </a:spcAft>
-              <a:defRPr sz="1200">
-                <a:solidFill>
-                  <a:srgbClr val="1E2733"/>
-                </a:solidFill>
-                <a:latin typeface="Noto Sans TC"/>
-              </a:defRPr>
-            </a:pPr>
-            <a:r>
-              <a:rPr sz="1200" b="0">
-                <a:solidFill>
-                  <a:srgbClr val="1E2733"/>
-                </a:solidFill>
-                <a:latin typeface="Noto Sans TC"/>
-              </a:rPr>
-              <a:t>• 房間尺寸、裝置/家具配置</a:t>
-            </a:r>
-          </a:p>
-          <a:p>
-            <a:pPr>
-              <a:lnSpc>
-                <a:spcPct val="114000"/>
-              </a:lnSpc>
-              <a:spcAft>
-                <a:spcPts val="400"/>
-              </a:spcAft>
-              <a:defRPr sz="1200">
-                <a:solidFill>
-                  <a:srgbClr val="1E2733"/>
-                </a:solidFill>
-                <a:latin typeface="Noto Sans TC"/>
-              </a:defRPr>
-            </a:pPr>
-            <a:r>
-              <a:rPr sz="1200" b="0">
-                <a:solidFill>
-                  <a:srgbClr val="1E2733"/>
-                </a:solidFill>
-                <a:latin typeface="Noto Sans TC"/>
-              </a:rPr>
-              <a:t>• 8 顆角落感測器</a:t>
-            </a:r>
-          </a:p>
-          <a:p>
-            <a:pPr>
-              <a:lnSpc>
-                <a:spcPct val="114000"/>
-              </a:lnSpc>
-              <a:spcAft>
-                <a:spcPts val="400"/>
-              </a:spcAft>
-              <a:defRPr sz="1200">
-                <a:solidFill>
-                  <a:srgbClr val="1E2733"/>
-                </a:solidFill>
-                <a:latin typeface="Noto Sans TC"/>
-              </a:defRPr>
-            </a:pPr>
-            <a:r>
-              <a:rPr sz="1200" b="0">
-                <a:solidFill>
-                  <a:srgbClr val="1E2733"/>
-                </a:solidFill>
-                <a:latin typeface="Noto Sans TC"/>
-              </a:rPr>
-              <a:t>• 室內 baseline 與外部邊界</a:t>
-            </a:r>
-          </a:p>
-          <a:p>
-            <a:pPr>
-              <a:lnSpc>
-                <a:spcPct val="114000"/>
-              </a:lnSpc>
-              <a:spcAft>
-                <a:spcPts val="400"/>
-              </a:spcAft>
-              <a:defRPr sz="1200">
-                <a:solidFill>
-                  <a:srgbClr val="1E2733"/>
-                </a:solidFill>
-                <a:latin typeface="Noto Sans TC"/>
-              </a:defRPr>
-            </a:pPr>
-            <a:r>
-              <a:rPr sz="1200" b="0">
-                <a:solidFill>
-                  <a:srgbClr val="1E2733"/>
-                </a:solidFill>
-                <a:latin typeface="Noto Sans TC"/>
-              </a:rPr>
-              <a:t>• 時間、設備狀態、使用者目標</a:t>
-            </a:r>
-          </a:p>
-        </p:txBody>
-      </p:sp>
-      <p:sp>
-        <p:nvSpPr>
-          <p:cNvPr id="15" name="Rectangle 14"/>
-          <p:cNvSpPr/>
-          <p:nvPr/>
-        </p:nvSpPr>
-        <p:spPr>
-          <a:xfrm>
-            <a:off x="4462272" y="3099816"/>
-            <a:ext cx="3337560" cy="2560320"/>
-          </a:xfrm>
-          <a:prstGeom prst="rect">
-            <a:avLst/>
-          </a:prstGeom>
-          <a:solidFill>
-            <a:srgbClr val="E2E8F0"/>
-          </a:solidFill>
-          <a:ln>
-            <a:solidFill>
-              <a:srgbClr val="E2E8F0"/>
-            </a:solidFill>
-          </a:ln>
-        </p:spPr>
-        <p:style>
-          <a:lnRef idx="1">
-            <a:schemeClr val="accent1"/>
-          </a:lnRef>
-          <a:fillRef idx="3">
-            <a:schemeClr val="accent1"/>
-          </a:fillRef>
-          <a:effectRef idx="2">
-            <a:schemeClr val="accent1"/>
-          </a:effectRef>
-          <a:fontRef idx="minor">
-            <a:schemeClr val="lt1"/>
-          </a:fontRef>
-        </p:style>
-        <p:txBody>
-          <a:bodyPr rtlCol="0" anchor="ctr"/>
-          <a:lstStyle/>
-          <a:p>
-            <a:pPr algn="ctr"/>
-          </a:p>
-        </p:txBody>
-      </p:sp>
-      <p:sp>
-        <p:nvSpPr>
-          <p:cNvPr id="16" name="Rectangle 15"/>
-          <p:cNvSpPr/>
-          <p:nvPr/>
-        </p:nvSpPr>
-        <p:spPr>
-          <a:xfrm>
-            <a:off x="4434840" y="3063240"/>
-            <a:ext cx="3337560" cy="2560320"/>
-          </a:xfrm>
-          <a:prstGeom prst="rect">
-            <a:avLst/>
-          </a:prstGeom>
-          <a:solidFill>
-            <a:srgbClr val="FFFFFF"/>
-          </a:solidFill>
-          <a:ln w="10160">
-            <a:solidFill>
-              <a:srgbClr val="D1DBE7"/>
-            </a:solidFill>
-          </a:ln>
-        </p:spPr>
-        <p:style>
-          <a:lnRef idx="1">
-            <a:schemeClr val="accent1"/>
-          </a:lnRef>
-          <a:fillRef idx="3">
-            <a:schemeClr val="accent1"/>
-          </a:fillRef>
-          <a:effectRef idx="2">
-            <a:schemeClr val="accent1"/>
-          </a:effectRef>
-          <a:fontRef idx="minor">
-            <a:schemeClr val="lt1"/>
-          </a:fontRef>
-        </p:style>
-        <p:txBody>
-          <a:bodyPr rtlCol="0" anchor="ctr"/>
-          <a:lstStyle/>
-          <a:p>
-            <a:pPr algn="ctr"/>
-          </a:p>
-        </p:txBody>
-      </p:sp>
-      <p:sp>
-        <p:nvSpPr>
-          <p:cNvPr id="17" name="Rectangle 16"/>
-          <p:cNvSpPr/>
-          <p:nvPr/>
-        </p:nvSpPr>
-        <p:spPr>
-          <a:xfrm>
-            <a:off x="4434840" y="3063240"/>
-            <a:ext cx="3337560" cy="73152"/>
-          </a:xfrm>
-          <a:prstGeom prst="rect">
-            <a:avLst/>
-          </a:prstGeom>
-          <a:solidFill>
-            <a:srgbClr val="2D9BC8"/>
-          </a:solidFill>
-          <a:ln>
-            <a:solidFill>
-              <a:srgbClr val="2D9BC8"/>
-            </a:solidFill>
-          </a:ln>
-        </p:spPr>
-        <p:style>
-          <a:lnRef idx="1">
-            <a:schemeClr val="accent1"/>
-          </a:lnRef>
-          <a:fillRef idx="3">
-            <a:schemeClr val="accent1"/>
-          </a:fillRef>
-          <a:effectRef idx="2">
-            <a:schemeClr val="accent1"/>
-          </a:effectRef>
-          <a:fontRef idx="minor">
-            <a:schemeClr val="lt1"/>
-          </a:fontRef>
-        </p:style>
-        <p:txBody>
-          <a:bodyPr rtlCol="0" anchor="ctr"/>
-          <a:lstStyle/>
-          <a:p>
-            <a:pPr algn="ctr"/>
-          </a:p>
-        </p:txBody>
-      </p:sp>
-      <p:sp>
-        <p:nvSpPr>
-          <p:cNvPr id="18" name="TextBox 17"/>
-          <p:cNvSpPr txBox="1"/>
-          <p:nvPr/>
-        </p:nvSpPr>
-        <p:spPr>
-          <a:xfrm>
-            <a:off x="4617720" y="3227832"/>
-            <a:ext cx="2971800" cy="329184"/>
-          </a:xfrm>
-          <a:prstGeom prst="rect">
-            <a:avLst/>
-          </a:prstGeom>
-          <a:noFill/>
-        </p:spPr>
-        <p:txBody>
-          <a:bodyPr wrap="square" lIns="0" rIns="0" tIns="0" bIns="0">
-            <a:normAutofit/>
-          </a:bodyPr>
-          <a:lstStyle/>
-          <a:p>
-            <a:pPr>
-              <a:defRPr sz="1600" b="1">
-                <a:solidFill>
-                  <a:srgbClr val="006194"/>
-                </a:solidFill>
-                <a:latin typeface="Noto Sans TC"/>
-              </a:defRPr>
-            </a:pPr>
-            <a:r>
-              <a:rPr sz="1600" b="1">
-                <a:solidFill>
-                  <a:srgbClr val="006194"/>
-                </a:solidFill>
-                <a:latin typeface="Noto Sans TC"/>
-              </a:rPr>
-              <a:t>模型</a:t>
-            </a:r>
-          </a:p>
-        </p:txBody>
-      </p:sp>
-      <p:sp>
-        <p:nvSpPr>
-          <p:cNvPr id="19" name="TextBox 18"/>
-          <p:cNvSpPr txBox="1"/>
-          <p:nvPr/>
-        </p:nvSpPr>
-        <p:spPr>
-          <a:xfrm>
-            <a:off x="4626864" y="3666744"/>
-            <a:ext cx="2953512" cy="1792224"/>
-          </a:xfrm>
-          <a:prstGeom prst="rect">
-            <a:avLst/>
-          </a:prstGeom>
-          <a:noFill/>
-        </p:spPr>
-        <p:txBody>
-          <a:bodyPr wrap="square" anchor="t" lIns="0" rIns="0" tIns="0" bIns="0">
-            <a:normAutofit/>
-          </a:bodyPr>
-          <a:lstStyle/>
-          <a:p>
-            <a:pPr>
-              <a:lnSpc>
-                <a:spcPct val="114000"/>
-              </a:lnSpc>
-              <a:spcAft>
-                <a:spcPts val="400"/>
-              </a:spcAft>
-              <a:defRPr sz="1200">
-                <a:solidFill>
-                  <a:srgbClr val="1E2733"/>
-                </a:solidFill>
-                <a:latin typeface="Noto Sans TC"/>
-              </a:defRPr>
-            </a:pPr>
-            <a:r>
-              <a:rPr sz="1200" b="0">
-                <a:solidFill>
-                  <a:srgbClr val="1E2733"/>
-                </a:solidFill>
-                <a:latin typeface="Noto Sans TC"/>
-              </a:rPr>
-              <a:t>• 溫度、濕度、照度各自的 nominal model</a:t>
-            </a:r>
-          </a:p>
-          <a:p>
-            <a:pPr>
-              <a:lnSpc>
-                <a:spcPct val="114000"/>
-              </a:lnSpc>
-              <a:spcAft>
-                <a:spcPts val="400"/>
-              </a:spcAft>
-              <a:defRPr sz="1200">
-                <a:solidFill>
-                  <a:srgbClr val="1E2733"/>
-                </a:solidFill>
-                <a:latin typeface="Noto Sans TC"/>
-              </a:defRPr>
-            </a:pPr>
-            <a:r>
-              <a:rPr sz="1200" b="0">
-                <a:solidFill>
-                  <a:srgbClr val="1E2733"/>
-                </a:solidFill>
-                <a:latin typeface="Noto Sans TC"/>
-              </a:rPr>
-              <a:t>• power calibration</a:t>
-            </a:r>
-          </a:p>
-          <a:p>
-            <a:pPr>
-              <a:lnSpc>
-                <a:spcPct val="114000"/>
-              </a:lnSpc>
-              <a:spcAft>
-                <a:spcPts val="400"/>
-              </a:spcAft>
-              <a:defRPr sz="1200">
-                <a:solidFill>
-                  <a:srgbClr val="1E2733"/>
-                </a:solidFill>
-                <a:latin typeface="Noto Sans TC"/>
-              </a:defRPr>
-            </a:pPr>
-            <a:r>
-              <a:rPr sz="1200" b="0">
-                <a:solidFill>
-                  <a:srgbClr val="1E2733"/>
-                </a:solidFill>
-                <a:latin typeface="Noto Sans TC"/>
-              </a:rPr>
-              <a:t>• trilinear residual correction</a:t>
-            </a:r>
-          </a:p>
-          <a:p>
-            <a:pPr>
-              <a:lnSpc>
-                <a:spcPct val="114000"/>
-              </a:lnSpc>
-              <a:spcAft>
-                <a:spcPts val="400"/>
-              </a:spcAft>
-              <a:defRPr sz="1200">
-                <a:solidFill>
-                  <a:srgbClr val="1E2733"/>
-                </a:solidFill>
-                <a:latin typeface="Noto Sans TC"/>
-              </a:defRPr>
-            </a:pPr>
-            <a:r>
-              <a:rPr sz="1200" b="0">
-                <a:solidFill>
-                  <a:srgbClr val="1E2733"/>
-                </a:solidFill>
-                <a:latin typeface="Noto Sans TC"/>
-              </a:rPr>
-              <a:t>• optional hybrid residual</a:t>
-            </a:r>
-          </a:p>
-        </p:txBody>
-      </p:sp>
-      <p:sp>
-        <p:nvSpPr>
-          <p:cNvPr id="20" name="Rectangle 19"/>
-          <p:cNvSpPr/>
-          <p:nvPr/>
-        </p:nvSpPr>
-        <p:spPr>
-          <a:xfrm>
-            <a:off x="8119871" y="3099816"/>
-            <a:ext cx="3291840" cy="2560320"/>
-          </a:xfrm>
-          <a:prstGeom prst="rect">
-            <a:avLst/>
-          </a:prstGeom>
-          <a:solidFill>
-            <a:srgbClr val="E2E8F0"/>
-          </a:solidFill>
-          <a:ln>
-            <a:solidFill>
-              <a:srgbClr val="E2E8F0"/>
-            </a:solidFill>
-          </a:ln>
-        </p:spPr>
-        <p:style>
-          <a:lnRef idx="1">
-            <a:schemeClr val="accent1"/>
-          </a:lnRef>
-          <a:fillRef idx="3">
-            <a:schemeClr val="accent1"/>
-          </a:fillRef>
-          <a:effectRef idx="2">
-            <a:schemeClr val="accent1"/>
-          </a:effectRef>
-          <a:fontRef idx="minor">
-            <a:schemeClr val="lt1"/>
-          </a:fontRef>
-        </p:style>
-        <p:txBody>
-          <a:bodyPr rtlCol="0" anchor="ctr"/>
-          <a:lstStyle/>
-          <a:p>
-            <a:pPr algn="ctr"/>
-          </a:p>
-        </p:txBody>
-      </p:sp>
-      <p:sp>
-        <p:nvSpPr>
-          <p:cNvPr id="21" name="Rectangle 20"/>
-          <p:cNvSpPr/>
-          <p:nvPr/>
-        </p:nvSpPr>
-        <p:spPr>
-          <a:xfrm>
-            <a:off x="8092440" y="3063240"/>
-            <a:ext cx="3291840" cy="2560320"/>
-          </a:xfrm>
-          <a:prstGeom prst="rect">
-            <a:avLst/>
-          </a:prstGeom>
-          <a:solidFill>
-            <a:srgbClr val="FFFFFF"/>
-          </a:solidFill>
-          <a:ln w="10160">
-            <a:solidFill>
-              <a:srgbClr val="D1DBE7"/>
-            </a:solidFill>
-          </a:ln>
-        </p:spPr>
-        <p:style>
-          <a:lnRef idx="1">
-            <a:schemeClr val="accent1"/>
-          </a:lnRef>
-          <a:fillRef idx="3">
-            <a:schemeClr val="accent1"/>
-          </a:fillRef>
-          <a:effectRef idx="2">
-            <a:schemeClr val="accent1"/>
-          </a:effectRef>
-          <a:fontRef idx="minor">
-            <a:schemeClr val="lt1"/>
-          </a:fontRef>
-        </p:style>
-        <p:txBody>
-          <a:bodyPr rtlCol="0" anchor="ctr"/>
-          <a:lstStyle/>
-          <a:p>
-            <a:pPr algn="ctr"/>
-          </a:p>
-        </p:txBody>
-      </p:sp>
-      <p:sp>
-        <p:nvSpPr>
-          <p:cNvPr id="22" name="Rectangle 21"/>
-          <p:cNvSpPr/>
-          <p:nvPr/>
-        </p:nvSpPr>
-        <p:spPr>
-          <a:xfrm>
-            <a:off x="8092440" y="3063240"/>
-            <a:ext cx="3291840" cy="73152"/>
-          </a:xfrm>
-          <a:prstGeom prst="rect">
-            <a:avLst/>
-          </a:prstGeom>
-          <a:solidFill>
-            <a:srgbClr val="2D9BC8"/>
-          </a:solidFill>
-          <a:ln>
-            <a:solidFill>
-              <a:srgbClr val="2D9BC8"/>
-            </a:solidFill>
-          </a:ln>
-        </p:spPr>
-        <p:style>
-          <a:lnRef idx="1">
-            <a:schemeClr val="accent1"/>
-          </a:lnRef>
-          <a:fillRef idx="3">
-            <a:schemeClr val="accent1"/>
-          </a:fillRef>
-          <a:effectRef idx="2">
-            <a:schemeClr val="accent1"/>
-          </a:effectRef>
-          <a:fontRef idx="minor">
-            <a:schemeClr val="lt1"/>
-          </a:fontRef>
-        </p:style>
-        <p:txBody>
-          <a:bodyPr rtlCol="0" anchor="ctr"/>
-          <a:lstStyle/>
-          <a:p>
-            <a:pPr algn="ctr"/>
-          </a:p>
-        </p:txBody>
-      </p:sp>
-      <p:sp>
-        <p:nvSpPr>
-          <p:cNvPr id="23" name="TextBox 22"/>
-          <p:cNvSpPr txBox="1"/>
-          <p:nvPr/>
-        </p:nvSpPr>
-        <p:spPr>
-          <a:xfrm>
-            <a:off x="8275319" y="3227832"/>
-            <a:ext cx="2926080" cy="329184"/>
-          </a:xfrm>
-          <a:prstGeom prst="rect">
-            <a:avLst/>
-          </a:prstGeom>
-          <a:noFill/>
-        </p:spPr>
-        <p:txBody>
-          <a:bodyPr wrap="square" lIns="0" rIns="0" tIns="0" bIns="0">
-            <a:normAutofit/>
-          </a:bodyPr>
-          <a:lstStyle/>
-          <a:p>
-            <a:pPr>
-              <a:defRPr sz="1600" b="1">
-                <a:solidFill>
-                  <a:srgbClr val="006194"/>
-                </a:solidFill>
-                <a:latin typeface="Noto Sans TC"/>
-              </a:defRPr>
-            </a:pPr>
-            <a:r>
-              <a:rPr sz="1600" b="1">
-                <a:solidFill>
-                  <a:srgbClr val="006194"/>
-                </a:solidFill>
-                <a:latin typeface="Noto Sans TC"/>
-              </a:rPr>
-              <a:t>輸出</a:t>
-            </a:r>
-          </a:p>
-        </p:txBody>
-      </p:sp>
-      <p:sp>
-        <p:nvSpPr>
-          <p:cNvPr id="24" name="TextBox 23"/>
-          <p:cNvSpPr txBox="1"/>
-          <p:nvPr/>
-        </p:nvSpPr>
-        <p:spPr>
-          <a:xfrm>
-            <a:off x="8284464" y="3666744"/>
-            <a:ext cx="2907792" cy="1792224"/>
-          </a:xfrm>
-          <a:prstGeom prst="rect">
-            <a:avLst/>
-          </a:prstGeom>
-          <a:noFill/>
-        </p:spPr>
-        <p:txBody>
-          <a:bodyPr wrap="square" anchor="t" lIns="0" rIns="0" tIns="0" bIns="0">
-            <a:normAutofit/>
-          </a:bodyPr>
-          <a:lstStyle/>
-          <a:p>
-            <a:pPr>
-              <a:lnSpc>
-                <a:spcPct val="114000"/>
-              </a:lnSpc>
-              <a:spcAft>
-                <a:spcPts val="400"/>
-              </a:spcAft>
-              <a:defRPr sz="1200">
-                <a:solidFill>
-                  <a:srgbClr val="1E2733"/>
-                </a:solidFill>
-                <a:latin typeface="Noto Sans TC"/>
-              </a:defRPr>
-            </a:pPr>
-            <a:r>
-              <a:rPr sz="1200" b="0">
-                <a:solidFill>
-                  <a:srgbClr val="1E2733"/>
-                </a:solidFill>
-                <a:latin typeface="Noto Sans TC"/>
-              </a:rPr>
-              <a:t>• 任意點/區域三因子估計</a:t>
-            </a:r>
-          </a:p>
-          <a:p>
-            <a:pPr>
-              <a:lnSpc>
-                <a:spcPct val="114000"/>
-              </a:lnSpc>
-              <a:spcAft>
-                <a:spcPts val="400"/>
-              </a:spcAft>
-              <a:defRPr sz="1200">
-                <a:solidFill>
-                  <a:srgbClr val="1E2733"/>
-                </a:solidFill>
-                <a:latin typeface="Noto Sans TC"/>
-              </a:defRPr>
-            </a:pPr>
-            <a:r>
-              <a:rPr sz="1200" b="0">
-                <a:solidFill>
-                  <a:srgbClr val="1E2733"/>
-                </a:solidFill>
-                <a:latin typeface="Noto Sans TC"/>
-              </a:rPr>
-              <a:t>• 3D 視覺化</a:t>
-            </a:r>
-          </a:p>
-          <a:p>
-            <a:pPr>
-              <a:lnSpc>
-                <a:spcPct val="114000"/>
-              </a:lnSpc>
-              <a:spcAft>
-                <a:spcPts val="400"/>
-              </a:spcAft>
-              <a:defRPr sz="1200">
-                <a:solidFill>
-                  <a:srgbClr val="1E2733"/>
-                </a:solidFill>
-                <a:latin typeface="Noto Sans TC"/>
-              </a:defRPr>
-            </a:pPr>
-            <a:r>
-              <a:rPr sz="1200" b="0">
-                <a:solidFill>
-                  <a:srgbClr val="1E2733"/>
-                </a:solidFill>
-                <a:latin typeface="Noto Sans TC"/>
-              </a:rPr>
-              <a:t>• 非連網裝置影響係數</a:t>
-            </a:r>
-          </a:p>
-          <a:p>
-            <a:pPr>
-              <a:lnSpc>
-                <a:spcPct val="114000"/>
-              </a:lnSpc>
-              <a:spcAft>
-                <a:spcPts val="400"/>
-              </a:spcAft>
-              <a:defRPr sz="1200">
-                <a:solidFill>
-                  <a:srgbClr val="1E2733"/>
-                </a:solidFill>
-                <a:latin typeface="Noto Sans TC"/>
-              </a:defRPr>
-            </a:pPr>
-            <a:r>
-              <a:rPr sz="1200" b="0">
-                <a:solidFill>
-                  <a:srgbClr val="1E2733"/>
-                </a:solidFill>
-                <a:latin typeface="Noto Sans TC"/>
-              </a:rPr>
-              <a:t>• 反事實推薦排序與 MCP 查詢</a:t>
-            </a:r>
-          </a:p>
-        </p:txBody>
-      </p:sp>
-      <p:sp>
-        <p:nvSpPr>
-          <p:cNvPr id="25" name="footer_page_number"/>
+              <a:t>論文整體邏輯：問題、方法、證據與結論邊界</a:t>
+            </a:r>
+          </a:p>
+        </p:txBody>
+      </p:sp>
+      <p:pic>
+        <p:nvPicPr>
+          <p:cNvPr id="5" name="Picture 4" descr="研究整體邏輯架構.png"/>
+          <p:cNvPicPr>
+            <a:picLocks noChangeAspect="1"/>
+          </p:cNvPicPr>
+          <p:nvPr/>
+        </p:nvPicPr>
+        <p:blipFill>
+          <a:blip r:embed="rId2"/>
+          <a:stretch>
+            <a:fillRect/>
+          </a:stretch>
+        </p:blipFill>
+        <p:spPr>
+          <a:xfrm>
+            <a:off x="1321317" y="1143000"/>
+            <a:ext cx="9564604" cy="5257800"/>
+          </a:xfrm>
+          <a:prstGeom prst="rect">
+            <a:avLst/>
+          </a:prstGeom>
+        </p:spPr>
+      </p:pic>
+      <p:sp>
+        <p:nvSpPr>
+          <p:cNvPr id="6" name="footer_page_number"/>
           <p:cNvSpPr txBox="1"/>
           <p:nvPr/>
         </p:nvSpPr>
@@ -44902,7 +44001,97 @@
                 </a:solidFill>
                 <a:latin typeface="Noto Sans TC"/>
               </a:rPr>
-              <a:t>• θᵥ：該變數 residual model 的參數</a:t>
+              <a:t>• 預測推廣：ŷ</a:t>
+            </a:r>
+            <a:r>
+              <a:rPr sz="800" baseline="-25000">
+                <a:solidFill>
+                  <a:srgbClr val="1E2733"/>
+                </a:solidFill>
+                <a:latin typeface="Noto Sans TC"/>
+              </a:rPr>
+              <a:t>hybrid</a:t>
+            </a:r>
+            <a:r>
+              <a:rPr sz="1200" b="0">
+                <a:solidFill>
+                  <a:srgbClr val="1E2733"/>
+                </a:solidFill>
+                <a:latin typeface="Noto Sans TC"/>
+              </a:rPr>
+              <a:t>(t+h|I</a:t>
+            </a:r>
+            <a:r>
+              <a:rPr sz="800" baseline="-25000">
+                <a:solidFill>
+                  <a:srgbClr val="1E2733"/>
+                </a:solidFill>
+                <a:latin typeface="Noto Sans TC"/>
+              </a:rPr>
+              <a:t>t</a:t>
+            </a:r>
+            <a:r>
+              <a:rPr sz="1200" b="0">
+                <a:solidFill>
+                  <a:srgbClr val="1E2733"/>
+                </a:solidFill>
+                <a:latin typeface="Noto Sans TC"/>
+              </a:rPr>
+              <a:t>)=ŷ</a:t>
+            </a:r>
+            <a:r>
+              <a:rPr sz="800" baseline="-25000">
+                <a:solidFill>
+                  <a:srgbClr val="1E2733"/>
+                </a:solidFill>
+                <a:latin typeface="Noto Sans TC"/>
+              </a:rPr>
+              <a:t>phys</a:t>
+            </a:r>
+            <a:r>
+              <a:rPr sz="1200" b="0">
+                <a:solidFill>
+                  <a:srgbClr val="1E2733"/>
+                </a:solidFill>
+                <a:latin typeface="Noto Sans TC"/>
+              </a:rPr>
+              <a:t>(t+h|I</a:t>
+            </a:r>
+            <a:r>
+              <a:rPr sz="800" baseline="-25000">
+                <a:solidFill>
+                  <a:srgbClr val="1E2733"/>
+                </a:solidFill>
+                <a:latin typeface="Noto Sans TC"/>
+              </a:rPr>
+              <a:t>t</a:t>
+            </a:r>
+            <a:r>
+              <a:rPr sz="1200" b="0">
+                <a:solidFill>
+                  <a:srgbClr val="1E2733"/>
+                </a:solidFill>
+                <a:latin typeface="Noto Sans TC"/>
+              </a:rPr>
+              <a:t>)+ê(t+h|I</a:t>
+            </a:r>
+            <a:r>
+              <a:rPr sz="800" baseline="-25000">
+                <a:solidFill>
+                  <a:srgbClr val="1E2733"/>
+                </a:solidFill>
+                <a:latin typeface="Noto Sans TC"/>
+              </a:rPr>
+              <a:t>t</a:t>
+            </a:r>
+            <a:r>
+              <a:rPr sz="1200" b="0">
+                <a:solidFill>
+                  <a:srgbClr val="1E2733"/>
+                </a:solidFill>
+                <a:latin typeface="Noto Sans TC"/>
+              </a:rPr>
+              <a:t>)</a:t>
             </a:r>
           </a:p>
           <a:p>
@@ -44927,7 +44116,7 @@
                 </a:solidFill>
                 <a:latin typeface="Noto Sans TC"/>
               </a:rPr>
-              <a:t>• 每個變數可有自己的 residual 修正器</a:t>
+              <a:t>• h 是 lead time；兩項對齊同一 target time</a:t>
             </a:r>
           </a:p>
         </p:txBody>
@@ -45177,7 +44366,7 @@
                 </a:solidFill>
                 <a:latin typeface="Noto Sans TC"/>
               </a:rPr>
-              <a:t>• 它只修正主模型剩下的系統性誤差</a:t>
+              <a:t>• physics 有 t+h：主模型須預測目標時刻 baseline</a:t>
             </a:r>
           </a:p>
           <a:p>
@@ -45202,7 +44391,25 @@
                 </a:solidFill>
                 <a:latin typeface="Noto Sans TC"/>
               </a:rPr>
-              <a:t>• 這樣可保留可解釋結構</a:t>
+              <a:t>• I</a:t>
+            </a:r>
+            <a:r>
+              <a:rPr sz="800" baseline="-25000">
+                <a:solidFill>
+                  <a:srgbClr val="1E2733"/>
+                </a:solidFill>
+                <a:latin typeface="Noto Sans TC"/>
+              </a:rPr>
+              <a:t>t</a:t>
+            </a:r>
+            <a:r>
+              <a:rPr sz="1200" b="0">
+                <a:solidFill>
+                  <a:srgbClr val="1E2733"/>
+                </a:solidFill>
+                <a:latin typeface="Noto Sans TC"/>
+              </a:rPr>
+              <a:t> 只含 t 時可得資訊；禁止未來觀測 leakage</a:t>
             </a:r>
           </a:p>
           <a:p>
@@ -45227,7 +44434,7 @@
                 </a:solidFill>
                 <a:latin typeface="Noto Sans TC"/>
               </a:rPr>
-              <a:t>• 也能用資料修正不易手刻的偏差</a:t>
+              <a:t>• 本研究目前為 current-state spatial estimate，即 h=0</a:t>
             </a:r>
           </a:p>
           <a:p>
